--- a/templates/cover/cover_A.pptx
+++ b/templates/cover/cover_A.pptx
@@ -3105,7 +3105,7 @@
         <p:spPr>
           <a:xfrm>
             <a:off x="0" y="0"/>
-            <a:ext cx="7560000" cy="6840000"/>
+            <a:ext cx="7560000" cy="7704000"/>
           </a:xfrm>
           <a:prstGeom prst="rect">
             <a:avLst/>
@@ -3148,8 +3148,8 @@
         </p:nvSpPr>
         <p:spPr>
           <a:xfrm>
-            <a:off x="0" y="6408000"/>
-            <a:ext cx="7560000" cy="72000"/>
+            <a:off x="0" y="7704000"/>
+            <a:ext cx="7560000" cy="43200"/>
           </a:xfrm>
           <a:prstGeom prst="rect">
             <a:avLst/>
@@ -3192,8 +3192,8 @@
         </p:nvSpPr>
         <p:spPr>
           <a:xfrm>
-            <a:off x="0" y="6840000"/>
-            <a:ext cx="7560000" cy="3852000"/>
+            <a:off x="0" y="7747200"/>
+            <a:ext cx="7560000" cy="2944800"/>
           </a:xfrm>
           <a:prstGeom prst="rect">
             <a:avLst/>
@@ -3236,8 +3236,8 @@
         </p:nvSpPr>
         <p:spPr>
           <a:xfrm>
-            <a:off x="432000" y="7200000"/>
-            <a:ext cx="6696000" cy="1008000"/>
+            <a:off x="432000" y="8679600"/>
+            <a:ext cx="6696000" cy="864000"/>
           </a:xfrm>
           <a:prstGeom prst="rect">
             <a:avLst/>
@@ -3256,7 +3256,7 @@
               </a:lnSpc>
             </a:pPr>
             <a:r>
-              <a:rPr sz="3000" b="1">
+              <a:rPr sz="2800" b="1">
                 <a:solidFill>
                   <a:srgbClr val="FFFFFF"/>
                 </a:solidFill>
@@ -3275,8 +3275,8 @@
         </p:nvSpPr>
         <p:spPr>
           <a:xfrm>
-            <a:off x="432000" y="8352000"/>
-            <a:ext cx="6696000" cy="360000"/>
+            <a:off x="432000" y="9507600"/>
+            <a:ext cx="6696000" cy="324000"/>
           </a:xfrm>
           <a:prstGeom prst="rect">
             <a:avLst/>
@@ -3295,9 +3295,9 @@
               </a:lnSpc>
             </a:pPr>
             <a:r>
-              <a:rPr sz="1400" b="0">
+              <a:rPr sz="1300" b="0">
                 <a:solidFill>
-                  <a:srgbClr val="E6E8EC"/>
+                  <a:srgbClr val="CDD2DE"/>
                 </a:solidFill>
                 <a:latin typeface="맑은 고딕"/>
               </a:rPr>

--- a/templates/cover/cover_A.pptx
+++ b/templates/cover/cover_A.pptx
@@ -3098,7 +3098,51 @@
       <p:grpSpPr/>
       <p:sp>
         <p:nvSpPr>
-          <p:cNvPr id="2" name="PHOTO_1"/>
+          <p:cNvPr id="2" name="Rectangle 1"/>
+          <p:cNvSpPr/>
+          <p:nvPr/>
+        </p:nvSpPr>
+        <p:spPr>
+          <a:xfrm>
+            <a:off x="0" y="0"/>
+            <a:ext cx="7560000" cy="10692000"/>
+          </a:xfrm>
+          <a:prstGeom prst="rect">
+            <a:avLst/>
+          </a:prstGeom>
+          <a:solidFill>
+            <a:srgbClr val="FFFFFF"/>
+          </a:solidFill>
+          <a:ln>
+            <a:noFill/>
+          </a:ln>
+          <a:effectLst/>
+        </p:spPr>
+        <p:style>
+          <a:lnRef idx="1">
+            <a:schemeClr val="accent1"/>
+          </a:lnRef>
+          <a:fillRef idx="3">
+            <a:schemeClr val="accent1"/>
+          </a:fillRef>
+          <a:effectRef idx="2">
+            <a:schemeClr val="accent1"/>
+          </a:effectRef>
+          <a:fontRef idx="minor">
+            <a:schemeClr val="lt1"/>
+          </a:fontRef>
+        </p:style>
+        <p:txBody>
+          <a:bodyPr rtlCol="0" anchor="ctr"/>
+          <a:lstStyle/>
+          <a:p>
+            <a:pPr algn="ctr"/>
+          </a:p>
+        </p:txBody>
+      </p:sp>
+      <p:sp>
+        <p:nvSpPr>
+          <p:cNvPr id="3" name="PHOTO_1"/>
           <p:cNvSpPr/>
           <p:nvPr/>
         </p:nvSpPr>
@@ -3142,7 +3186,7 @@
       </p:sp>
       <p:sp>
         <p:nvSpPr>
-          <p:cNvPr id="3" name="Rectangle 2"/>
+          <p:cNvPr id="4" name="Rectangle 3"/>
           <p:cNvSpPr/>
           <p:nvPr/>
         </p:nvSpPr>
@@ -3186,7 +3230,7 @@
       </p:sp>
       <p:sp>
         <p:nvSpPr>
-          <p:cNvPr id="4" name="Rectangle 3"/>
+          <p:cNvPr id="5" name="Rectangle 4"/>
           <p:cNvSpPr/>
           <p:nvPr/>
         </p:nvSpPr>
@@ -3230,7 +3274,7 @@
       </p:sp>
       <p:sp>
         <p:nvSpPr>
-          <p:cNvPr id="5" name="TextBox 4"/>
+          <p:cNvPr id="6" name="TextBox 5"/>
           <p:cNvSpPr txBox="1"/>
           <p:nvPr/>
         </p:nvSpPr>
@@ -3269,7 +3313,7 @@
       </p:sp>
       <p:sp>
         <p:nvSpPr>
-          <p:cNvPr id="6" name="TextBox 5"/>
+          <p:cNvPr id="7" name="TextBox 6"/>
           <p:cNvSpPr txBox="1"/>
           <p:nvPr/>
         </p:nvSpPr>
